--- a/presentations/briefing-executivo-latest.pptx
+++ b/presentations/briefing-executivo-latest.pptx
@@ -3153,7 +3153,7 @@
               <a:defRPr sz="1900"/>
             </a:pPr>
             <a:r>
-              <a:t>Snapshot 2026-09-11 · v0.3.1</a:t>
+              <a:t>Snapshot 2026-09-12 · v0.3.1</a:t>
             </a:r>
           </a:p>
           <a:p>
@@ -3247,7 +3247,7 @@
               <a:defRPr sz="1900"/>
             </a:pPr>
             <a:r>
-              <a:t>20,019 registros de candidatura</a:t>
+              <a:t>20,028 registros de candidatura</a:t>
             </a:r>
           </a:p>
           <a:p>
@@ -3258,7 +3258,7 @@
               <a:defRPr sz="1900"/>
             </a:pPr>
             <a:r>
-              <a:t>Receitas agregadas: R$ 4,537,986,375.17</a:t>
+              <a:t>Receitas agregadas: R$ 4,941,135,270.85</a:t>
             </a:r>
           </a:p>
           <a:p>
@@ -3269,7 +3269,7 @@
               <a:defRPr sz="1900"/>
             </a:pPr>
             <a:r>
-              <a:t>Despesas contratadas: R$ 781,031,714.09</a:t>
+              <a:t>Despesas contratadas: R$ 1,332,546,190.13</a:t>
             </a:r>
           </a:p>
         </p:txBody>

--- a/presentations/briefing-executivo-latest.pptx
+++ b/presentations/briefing-executivo-latest.pptx
@@ -3247,7 +3247,7 @@
               <a:defRPr sz="1900"/>
             </a:pPr>
             <a:r>
-              <a:t>20,028 registros de candidatura</a:t>
+              <a:t>20,031 registros de candidatura</a:t>
             </a:r>
           </a:p>
           <a:p>

--- a/presentations/briefing-executivo-latest.pptx
+++ b/presentations/briefing-executivo-latest.pptx
@@ -3153,7 +3153,7 @@
               <a:defRPr sz="1900"/>
             </a:pPr>
             <a:r>
-              <a:t>Snapshot 2026-09-12 · v0.3.1</a:t>
+              <a:t>Snapshot 2026-09-13 · v0.3.1</a:t>
             </a:r>
           </a:p>
           <a:p>

--- a/presentations/briefing-executivo-latest.pptx
+++ b/presentations/briefing-executivo-latest.pptx
@@ -3247,7 +3247,7 @@
               <a:defRPr sz="1900"/>
             </a:pPr>
             <a:r>
-              <a:t>20,031 registros de candidatura</a:t>
+              <a:t>20,032 registros de candidatura</a:t>
             </a:r>
           </a:p>
           <a:p>
@@ -3258,7 +3258,7 @@
               <a:defRPr sz="1900"/>
             </a:pPr>
             <a:r>
-              <a:t>Receitas agregadas: R$ 4,941,135,270.85</a:t>
+              <a:t>Receitas agregadas: R$ 5,112,304,856.00</a:t>
             </a:r>
           </a:p>
           <a:p>
@@ -3269,7 +3269,7 @@
               <a:defRPr sz="1900"/>
             </a:pPr>
             <a:r>
-              <a:t>Despesas contratadas: R$ 1,332,546,190.13</a:t>
+              <a:t>Despesas contratadas: R$ 2,204,954,519.64</a:t>
             </a:r>
           </a:p>
         </p:txBody>

--- a/presentations/briefing-executivo-latest.pptx
+++ b/presentations/briefing-executivo-latest.pptx
@@ -3247,7 +3247,7 @@
               <a:defRPr sz="1900"/>
             </a:pPr>
             <a:r>
-              <a:t>20,032 registros de candidatura</a:t>
+              <a:t>20,034 registros de candidatura</a:t>
             </a:r>
           </a:p>
           <a:p>

--- a/presentations/briefing-executivo-latest.pptx
+++ b/presentations/briefing-executivo-latest.pptx
@@ -3153,7 +3153,7 @@
               <a:defRPr sz="1900"/>
             </a:pPr>
             <a:r>
-              <a:t>Snapshot 2026-09-13 · v0.3.1</a:t>
+              <a:t>Snapshot 2026-09-14 · v0.3.1</a:t>
             </a:r>
           </a:p>
           <a:p>

--- a/presentations/briefing-executivo-latest.pptx
+++ b/presentations/briefing-executivo-latest.pptx
@@ -3153,7 +3153,7 @@
               <a:defRPr sz="1900"/>
             </a:pPr>
             <a:r>
-              <a:t>Snapshot 2026-09-14 · v0.3.1</a:t>
+              <a:t>Snapshot 2026-09-15 · v0.3.1</a:t>
             </a:r>
           </a:p>
           <a:p>
@@ -3247,7 +3247,7 @@
               <a:defRPr sz="1900"/>
             </a:pPr>
             <a:r>
-              <a:t>20,034 registros de candidatura</a:t>
+              <a:t>20,037 registros de candidatura</a:t>
             </a:r>
           </a:p>
           <a:p>

--- a/presentations/briefing-executivo-latest.pptx
+++ b/presentations/briefing-executivo-latest.pptx
@@ -3247,7 +3247,7 @@
               <a:defRPr sz="1900"/>
             </a:pPr>
             <a:r>
-              <a:t>20,037 registros de candidatura</a:t>
+              <a:t>20,046 registros de candidatura</a:t>
             </a:r>
           </a:p>
           <a:p>

--- a/presentations/briefing-executivo-latest.pptx
+++ b/presentations/briefing-executivo-latest.pptx
@@ -3153,7 +3153,7 @@
               <a:defRPr sz="1900"/>
             </a:pPr>
             <a:r>
-              <a:t>Snapshot 2026-09-15 · v0.3.1</a:t>
+              <a:t>Snapshot 2026-09-17 · v0.3.1</a:t>
             </a:r>
           </a:p>
           <a:p>
@@ -3247,7 +3247,7 @@
               <a:defRPr sz="1900"/>
             </a:pPr>
             <a:r>
-              <a:t>20,046 registros de candidatura</a:t>
+              <a:t>20,060 registros de candidatura</a:t>
             </a:r>
           </a:p>
           <a:p>
@@ -3258,7 +3258,7 @@
               <a:defRPr sz="1900"/>
             </a:pPr>
             <a:r>
-              <a:t>Receitas agregadas: R$ 5,112,304,856.00</a:t>
+              <a:t>Receitas agregadas: R$ 5,487,980,158.81</a:t>
             </a:r>
           </a:p>
           <a:p>
@@ -3269,7 +3269,7 @@
               <a:defRPr sz="1900"/>
             </a:pPr>
             <a:r>
-              <a:t>Despesas contratadas: R$ 2,204,954,519.64</a:t>
+              <a:t>Despesas contratadas: R$ 3,583,886,386.45</a:t>
             </a:r>
           </a:p>
         </p:txBody>

--- a/presentations/briefing-executivo-latest.pptx
+++ b/presentations/briefing-executivo-latest.pptx
@@ -3153,7 +3153,7 @@
               <a:defRPr sz="1900"/>
             </a:pPr>
             <a:r>
-              <a:t>Snapshot 2026-09-17 · v0.3.1</a:t>
+              <a:t>Snapshot 2026-09-18 · v0.3.1</a:t>
             </a:r>
           </a:p>
           <a:p>

--- a/presentations/briefing-executivo-latest.pptx
+++ b/presentations/briefing-executivo-latest.pptx
@@ -3258,7 +3258,7 @@
               <a:defRPr sz="1900"/>
             </a:pPr>
             <a:r>
-              <a:t>Receitas agregadas: R$ 5,487,980,158.81</a:t>
+              <a:t>Receitas agregadas: R$ 5,584,888,348.00</a:t>
             </a:r>
           </a:p>
           <a:p>
@@ -3269,7 +3269,7 @@
               <a:defRPr sz="1900"/>
             </a:pPr>
             <a:r>
-              <a:t>Despesas contratadas: R$ 3,583,886,386.45</a:t>
+              <a:t>Despesas contratadas: R$ 3,614,839,437.95</a:t>
             </a:r>
           </a:p>
         </p:txBody>

--- a/presentations/briefing-executivo-latest.pptx
+++ b/presentations/briefing-executivo-latest.pptx
@@ -3153,7 +3153,7 @@
               <a:defRPr sz="1900"/>
             </a:pPr>
             <a:r>
-              <a:t>Snapshot 2026-09-18 · v0.3.1</a:t>
+              <a:t>Snapshot 2026-09-19 · v0.3.1</a:t>
             </a:r>
           </a:p>
           <a:p>

--- a/presentations/briefing-executivo-latest.pptx
+++ b/presentations/briefing-executivo-latest.pptx
@@ -3258,7 +3258,7 @@
               <a:defRPr sz="1900"/>
             </a:pPr>
             <a:r>
-              <a:t>Receitas agregadas: R$ 5,584,888,348.00</a:t>
+              <a:t>Receitas agregadas: R$ 5,662,847,203.74</a:t>
             </a:r>
           </a:p>
           <a:p>
@@ -3269,7 +3269,7 @@
               <a:defRPr sz="1900"/>
             </a:pPr>
             <a:r>
-              <a:t>Despesas contratadas: R$ 3,614,839,437.95</a:t>
+              <a:t>Despesas contratadas: R$ 3,639,294,391.85</a:t>
             </a:r>
           </a:p>
         </p:txBody>

--- a/presentations/briefing-executivo-latest.pptx
+++ b/presentations/briefing-executivo-latest.pptx
@@ -3153,7 +3153,7 @@
               <a:defRPr sz="1900"/>
             </a:pPr>
             <a:r>
-              <a:t>Snapshot 2026-09-19 · v0.3.1</a:t>
+              <a:t>Snapshot 2026-09-20 · v0.3.1</a:t>
             </a:r>
           </a:p>
           <a:p>

--- a/presentations/briefing-executivo-latest.pptx
+++ b/presentations/briefing-executivo-latest.pptx
@@ -3247,7 +3247,7 @@
               <a:defRPr sz="1900"/>
             </a:pPr>
             <a:r>
-              <a:t>20,060 registros de candidatura</a:t>
+              <a:t>20,061 registros de candidatura</a:t>
             </a:r>
           </a:p>
           <a:p>

--- a/presentations/briefing-executivo-latest.pptx
+++ b/presentations/briefing-executivo-latest.pptx
@@ -3258,7 +3258,7 @@
               <a:defRPr sz="1900"/>
             </a:pPr>
             <a:r>
-              <a:t>Receitas agregadas: R$ 5,662,847,203.74</a:t>
+              <a:t>Receitas agregadas: R$ 5,698,171,271.64</a:t>
             </a:r>
           </a:p>
           <a:p>
@@ -3269,7 +3269,7 @@
               <a:defRPr sz="1900"/>
             </a:pPr>
             <a:r>
-              <a:t>Despesas contratadas: R$ 3,639,294,391.85</a:t>
+              <a:t>Despesas contratadas: R$ 3,653,198,317.27</a:t>
             </a:r>
           </a:p>
         </p:txBody>

--- a/presentations/briefing-executivo-latest.pptx
+++ b/presentations/briefing-executivo-latest.pptx
@@ -3153,7 +3153,7 @@
               <a:defRPr sz="1900"/>
             </a:pPr>
             <a:r>
-              <a:t>Snapshot 2026-09-20 · v0.3.1</a:t>
+              <a:t>Snapshot 2026-09-21 · v0.3.1</a:t>
             </a:r>
           </a:p>
           <a:p>

--- a/presentations/briefing-executivo-latest.pptx
+++ b/presentations/briefing-executivo-latest.pptx
@@ -3153,7 +3153,7 @@
               <a:defRPr sz="1900"/>
             </a:pPr>
             <a:r>
-              <a:t>Snapshot 2026-09-21 · v0.3.1</a:t>
+              <a:t>Snapshot 2026-09-22 · v0.3.1</a:t>
             </a:r>
           </a:p>
           <a:p>
@@ -3258,7 +3258,7 @@
               <a:defRPr sz="1900"/>
             </a:pPr>
             <a:r>
-              <a:t>Receitas agregadas: R$ 5,698,171,271.64</a:t>
+              <a:t>Receitas agregadas: R$ 5,713,744,733.84</a:t>
             </a:r>
           </a:p>
           <a:p>
@@ -3269,7 +3269,7 @@
               <a:defRPr sz="1900"/>
             </a:pPr>
             <a:r>
-              <a:t>Despesas contratadas: R$ 3,653,198,317.27</a:t>
+              <a:t>Despesas contratadas: R$ 3,664,116,784.50</a:t>
             </a:r>
           </a:p>
         </p:txBody>

--- a/presentations/briefing-executivo-latest.pptx
+++ b/presentations/briefing-executivo-latest.pptx
@@ -3258,7 +3258,7 @@
               <a:defRPr sz="1900"/>
             </a:pPr>
             <a:r>
-              <a:t>Receitas agregadas: R$ 5,713,744,733.84</a:t>
+              <a:t>Receitas agregadas: R$ 5,763,156,297.84</a:t>
             </a:r>
           </a:p>
           <a:p>
@@ -3269,7 +3269,7 @@
               <a:defRPr sz="1900"/>
             </a:pPr>
             <a:r>
-              <a:t>Despesas contratadas: R$ 3,664,116,784.50</a:t>
+              <a:t>Despesas contratadas: R$ 3,693,983,561.38</a:t>
             </a:r>
           </a:p>
         </p:txBody>

--- a/presentations/briefing-executivo-latest.pptx
+++ b/presentations/briefing-executivo-latest.pptx
@@ -3153,7 +3153,7 @@
               <a:defRPr sz="1900"/>
             </a:pPr>
             <a:r>
-              <a:t>Snapshot 2026-09-22 · v0.3.1</a:t>
+              <a:t>Snapshot 2026-09-23 · v0.3.1</a:t>
             </a:r>
           </a:p>
           <a:p>

--- a/presentations/briefing-executivo-latest.pptx
+++ b/presentations/briefing-executivo-latest.pptx
@@ -3153,7 +3153,7 @@
               <a:defRPr sz="1900"/>
             </a:pPr>
             <a:r>
-              <a:t>Snapshot 2026-09-23 · v0.3.1</a:t>
+              <a:t>Snapshot 2026-09-24 · v0.3.1</a:t>
             </a:r>
           </a:p>
           <a:p>
@@ -3258,7 +3258,7 @@
               <a:defRPr sz="1900"/>
             </a:pPr>
             <a:r>
-              <a:t>Receitas agregadas: R$ 5,763,156,297.84</a:t>
+              <a:t>Receitas agregadas: R$ 5,805,521,177.42</a:t>
             </a:r>
           </a:p>
           <a:p>
@@ -3269,7 +3269,7 @@
               <a:defRPr sz="1900"/>
             </a:pPr>
             <a:r>
-              <a:t>Despesas contratadas: R$ 3,693,983,561.38</a:t>
+              <a:t>Despesas contratadas: R$ 3,720,287,524.20</a:t>
             </a:r>
           </a:p>
         </p:txBody>

--- a/presentations/briefing-executivo-latest.pptx
+++ b/presentations/briefing-executivo-latest.pptx
@@ -3247,7 +3247,7 @@
               <a:defRPr sz="1900"/>
             </a:pPr>
             <a:r>
-              <a:t>20,061 registros de candidatura</a:t>
+              <a:t>20,062 registros de candidatura</a:t>
             </a:r>
           </a:p>
           <a:p>

--- a/presentations/briefing-executivo-latest.pptx
+++ b/presentations/briefing-executivo-latest.pptx
@@ -3258,7 +3258,7 @@
               <a:defRPr sz="1900"/>
             </a:pPr>
             <a:r>
-              <a:t>Receitas agregadas: R$ 5,805,521,177.42</a:t>
+              <a:t>Receitas agregadas: R$ 5,864,634,246.61</a:t>
             </a:r>
           </a:p>
           <a:p>
@@ -3269,7 +3269,7 @@
               <a:defRPr sz="1900"/>
             </a:pPr>
             <a:r>
-              <a:t>Despesas contratadas: R$ 3,720,287,524.20</a:t>
+              <a:t>Despesas contratadas: R$ 3,749,116,474.93</a:t>
             </a:r>
           </a:p>
         </p:txBody>

--- a/presentations/briefing-executivo-latest.pptx
+++ b/presentations/briefing-executivo-latest.pptx
@@ -3153,7 +3153,7 @@
               <a:defRPr sz="1900"/>
             </a:pPr>
             <a:r>
-              <a:t>Snapshot 2026-09-24 · v0.3.1</a:t>
+              <a:t>Snapshot 2026-09-25 · v0.3.1</a:t>
             </a:r>
           </a:p>
           <a:p>

--- a/presentations/briefing-executivo-latest.pptx
+++ b/presentations/briefing-executivo-latest.pptx
@@ -3153,7 +3153,7 @@
               <a:defRPr sz="1900"/>
             </a:pPr>
             <a:r>
-              <a:t>Snapshot 2026-09-25 · v0.3.1</a:t>
+              <a:t>Snapshot 2026-09-26 · v0.3.1</a:t>
             </a:r>
           </a:p>
           <a:p>

--- a/presentations/briefing-executivo-latest.pptx
+++ b/presentations/briefing-executivo-latest.pptx
@@ -3247,7 +3247,7 @@
               <a:defRPr sz="1900"/>
             </a:pPr>
             <a:r>
-              <a:t>20,062 registros de candidatura</a:t>
+              <a:t>20,063 registros de candidatura</a:t>
             </a:r>
           </a:p>
           <a:p>
@@ -3258,7 +3258,7 @@
               <a:defRPr sz="1900"/>
             </a:pPr>
             <a:r>
-              <a:t>Receitas agregadas: R$ 5,864,634,246.61</a:t>
+              <a:t>Receitas agregadas: R$ 5,922,745,379.04</a:t>
             </a:r>
           </a:p>
           <a:p>
@@ -3269,7 +3269,7 @@
               <a:defRPr sz="1900"/>
             </a:pPr>
             <a:r>
-              <a:t>Despesas contratadas: R$ 3,749,116,474.93</a:t>
+              <a:t>Despesas contratadas: R$ 3,789,454,734.76</a:t>
             </a:r>
           </a:p>
         </p:txBody>

--- a/presentations/briefing-executivo-latest.pptx
+++ b/presentations/briefing-executivo-latest.pptx
@@ -3258,7 +3258,7 @@
               <a:defRPr sz="1900"/>
             </a:pPr>
             <a:r>
-              <a:t>Receitas agregadas: R$ 5,922,745,379.04</a:t>
+              <a:t>Receitas agregadas: R$ 5,984,783,096.98</a:t>
             </a:r>
           </a:p>
           <a:p>
@@ -3269,7 +3269,7 @@
               <a:defRPr sz="1900"/>
             </a:pPr>
             <a:r>
-              <a:t>Despesas contratadas: R$ 3,789,454,734.76</a:t>
+              <a:t>Despesas contratadas: R$ 3,842,569,575.70</a:t>
             </a:r>
           </a:p>
         </p:txBody>

--- a/presentations/briefing-executivo-latest.pptx
+++ b/presentations/briefing-executivo-latest.pptx
@@ -3153,7 +3153,7 @@
               <a:defRPr sz="1900"/>
             </a:pPr>
             <a:r>
-              <a:t>Snapshot 2026-09-26 · v0.3.1</a:t>
+              <a:t>Snapshot 2026-09-27 · v0.3.1</a:t>
             </a:r>
           </a:p>
           <a:p>

--- a/presentations/briefing-executivo-latest.pptx
+++ b/presentations/briefing-executivo-latest.pptx
@@ -3258,7 +3258,7 @@
               <a:defRPr sz="1900"/>
             </a:pPr>
             <a:r>
-              <a:t>Receitas agregadas: R$ 5,984,783,096.98</a:t>
+              <a:t>Receitas agregadas: R$ 6,012,454,565.84</a:t>
             </a:r>
           </a:p>
           <a:p>
@@ -3269,7 +3269,7 @@
               <a:defRPr sz="1900"/>
             </a:pPr>
             <a:r>
-              <a:t>Despesas contratadas: R$ 3,842,569,575.70</a:t>
+              <a:t>Despesas contratadas: R$ 3,859,427,438.43</a:t>
             </a:r>
           </a:p>
         </p:txBody>

--- a/presentations/briefing-executivo-latest.pptx
+++ b/presentations/briefing-executivo-latest.pptx
@@ -3153,7 +3153,7 @@
               <a:defRPr sz="1900"/>
             </a:pPr>
             <a:r>
-              <a:t>Snapshot 2026-09-27 · v0.3.1</a:t>
+              <a:t>Snapshot 2026-09-28 · v0.3.1</a:t>
             </a:r>
           </a:p>
           <a:p>

--- a/presentations/briefing-executivo-latest.pptx
+++ b/presentations/briefing-executivo-latest.pptx
@@ -3153,7 +3153,7 @@
               <a:defRPr sz="1900"/>
             </a:pPr>
             <a:r>
-              <a:t>Snapshot 2026-09-28 · v0.3.1</a:t>
+              <a:t>Snapshot 2026-09-29 · v0.3.1</a:t>
             </a:r>
           </a:p>
           <a:p>
@@ -3258,7 +3258,7 @@
               <a:defRPr sz="1900"/>
             </a:pPr>
             <a:r>
-              <a:t>Receitas agregadas: R$ 6,012,454,565.84</a:t>
+              <a:t>Receitas agregadas: R$ 6,032,605,157.64</a:t>
             </a:r>
           </a:p>
           <a:p>
@@ -3269,7 +3269,7 @@
               <a:defRPr sz="1900"/>
             </a:pPr>
             <a:r>
-              <a:t>Despesas contratadas: R$ 3,859,427,438.43</a:t>
+              <a:t>Despesas contratadas: R$ 3,871,539,026.49</a:t>
             </a:r>
           </a:p>
         </p:txBody>

--- a/presentations/briefing-executivo-latest.pptx
+++ b/presentations/briefing-executivo-latest.pptx
@@ -3258,7 +3258,7 @@
               <a:defRPr sz="1900"/>
             </a:pPr>
             <a:r>
-              <a:t>Receitas agregadas: R$ 6,032,605,157.64</a:t>
+              <a:t>Receitas agregadas: R$ 6,078,702,229.57</a:t>
             </a:r>
           </a:p>
           <a:p>
@@ -3269,7 +3269,7 @@
               <a:defRPr sz="1900"/>
             </a:pPr>
             <a:r>
-              <a:t>Despesas contratadas: R$ 3,871,539,026.49</a:t>
+              <a:t>Despesas contratadas: R$ 3,909,925,399.87</a:t>
             </a:r>
           </a:p>
         </p:txBody>

--- a/presentations/briefing-executivo-latest.pptx
+++ b/presentations/briefing-executivo-latest.pptx
@@ -3153,7 +3153,7 @@
               <a:defRPr sz="1900"/>
             </a:pPr>
             <a:r>
-              <a:t>Snapshot 2026-09-29 · v0.3.1</a:t>
+              <a:t>Snapshot 2026-09-30 · v0.3.1</a:t>
             </a:r>
           </a:p>
           <a:p>
@@ -3247,7 +3247,7 @@
               <a:defRPr sz="1900"/>
             </a:pPr>
             <a:r>
-              <a:t>20,063 registros de candidatura</a:t>
+              <a:t>20,064 registros de candidatura</a:t>
             </a:r>
           </a:p>
           <a:p>

--- a/presentations/briefing-executivo-latest.pptx
+++ b/presentations/briefing-executivo-latest.pptx
@@ -3258,7 +3258,7 @@
               <a:defRPr sz="1900"/>
             </a:pPr>
             <a:r>
-              <a:t>Receitas agregadas: R$ 6,078,702,229.57</a:t>
+              <a:t>Receitas agregadas: R$ 6,138,159,949.84</a:t>
             </a:r>
           </a:p>
           <a:p>
@@ -3269,7 +3269,7 @@
               <a:defRPr sz="1900"/>
             </a:pPr>
             <a:r>
-              <a:t>Despesas contratadas: R$ 3,909,925,399.87</a:t>
+              <a:t>Despesas contratadas: R$ 3,960,901,823.56</a:t>
             </a:r>
           </a:p>
         </p:txBody>

--- a/presentations/briefing-executivo-latest.pptx
+++ b/presentations/briefing-executivo-latest.pptx
@@ -3153,7 +3153,7 @@
               <a:defRPr sz="1900"/>
             </a:pPr>
             <a:r>
-              <a:t>Snapshot 2026-09-30 · v0.3.1</a:t>
+              <a:t>Snapshot 2026-10-01 · v0.3.1</a:t>
             </a:r>
           </a:p>
           <a:p>

--- a/presentations/briefing-executivo-latest.pptx
+++ b/presentations/briefing-executivo-latest.pptx
@@ -3258,7 +3258,7 @@
               <a:defRPr sz="1900"/>
             </a:pPr>
             <a:r>
-              <a:t>Receitas agregadas: R$ 6,138,159,949.84</a:t>
+              <a:t>Receitas agregadas: R$ 6,216,516,292.34</a:t>
             </a:r>
           </a:p>
           <a:p>
@@ -3269,7 +3269,7 @@
               <a:defRPr sz="1900"/>
             </a:pPr>
             <a:r>
-              <a:t>Despesas contratadas: R$ 3,960,901,823.56</a:t>
+              <a:t>Despesas contratadas: R$ 4,033,065,725.78</a:t>
             </a:r>
           </a:p>
         </p:txBody>

--- a/presentations/briefing-executivo-latest.pptx
+++ b/presentations/briefing-executivo-latest.pptx
@@ -3153,7 +3153,7 @@
               <a:defRPr sz="1900"/>
             </a:pPr>
             <a:r>
-              <a:t>Snapshot 2026-10-01 · v0.3.1</a:t>
+              <a:t>Snapshot 2026-10-02 · v0.3.1</a:t>
             </a:r>
           </a:p>
           <a:p>

--- a/presentations/briefing-executivo-latest.pptx
+++ b/presentations/briefing-executivo-latest.pptx
@@ -3258,7 +3258,7 @@
               <a:defRPr sz="1900"/>
             </a:pPr>
             <a:r>
-              <a:t>Receitas agregadas: R$ 6,216,516,292.34</a:t>
+              <a:t>Receitas agregadas: R$ 6,277,827,604.51</a:t>
             </a:r>
           </a:p>
           <a:p>
@@ -3269,7 +3269,7 @@
               <a:defRPr sz="1900"/>
             </a:pPr>
             <a:r>
-              <a:t>Despesas contratadas: R$ 4,033,065,725.78</a:t>
+              <a:t>Despesas contratadas: R$ 4,103,396,612.50</a:t>
             </a:r>
           </a:p>
         </p:txBody>

--- a/presentations/briefing-executivo-latest.pptx
+++ b/presentations/briefing-executivo-latest.pptx
@@ -3153,7 +3153,7 @@
               <a:defRPr sz="1900"/>
             </a:pPr>
             <a:r>
-              <a:t>Snapshot 2026-10-02 · v0.3.1</a:t>
+              <a:t>Snapshot 2026-10-03 · v0.3.1</a:t>
             </a:r>
           </a:p>
           <a:p>
